--- a/deliverables/AuroraCart_Executive_Story.pptx
+++ b/deliverables/AuroraCart_Executive_Story.pptx
@@ -518,7 +518,7 @@
           <a:lstStyle/>
           <a:p>
             <a:r>
-              <a:t>[0:00–0:30] Two years ago this company was smaller and more profitable. Today it is much larger and materially less profitable. I am going to show you where that profit went, why the usual explanations are wrong, and the three things I would do about it. Five charts do most of the work.</a:t>
+              <a:t>[0:00-0:30] Two years ago this company was smaller and more profitable. Today it is much larger and materially less profitable. I am going to show you where that profit went, why the usual explanations are wrong, and the three things I would do about it. Five charts do most of the work.</a:t>
             </a:r>
           </a:p>
         </p:txBody>
@@ -588,7 +588,7 @@
           <a:lstStyle/>
           <a:p>
             <a:r>
-              <a:t>[5:45–5:55]</a:t>
+              <a:t>[5:45-5:55]</a:t>
             </a:r>
           </a:p>
         </p:txBody>
@@ -658,7 +658,7 @@
           <a:lstStyle/>
           <a:p>
             <a:r>
-              <a:t>[5:55–6:50] This is the most actionable chart in the deck. Discount tolerance is a function of cost structure, and we have been setting it company-wide. Read this as tolerance, not as a response curve — deeply discounted orders also differ in what is in them, and I am not claiming the discount caused the margin. But the policy implication survives either reading: the ceiling has to be set per category.</a:t>
+              <a:t>[5:55-6:50] This is the most actionable chart in the deck. Discount tolerance is a function of cost structure, and we have been setting it company-wide. Read this as tolerance, not as a response curve. Deeply discounted orders also differ in what is in them, and I am not claiming the discount caused the margin. But the policy implication survives either reading: the ceiling has to be set per category.</a:t>
             </a:r>
           </a:p>
         </p:txBody>
@@ -728,7 +728,7 @@
           <a:lstStyle/>
           <a:p>
             <a:r>
-              <a:t>[6:50–7:30] The leadership team asked whether the answer is geography, customer type, channel or fulfilment. Measured properly — spread in margin, weighted by how much revenue each cut actually splits — it is none of those. It is product. This is the slide that settles the argument in the room.</a:t>
+              <a:t>[6:50-7:30] The leadership team asked whether the answer is geography, customer type, channel or fulfilment. Measured properly, as spread in margin weighted by how much revenue each cut actually splits, it is none of those. It is product. This is the slide that settles the argument in the room.</a:t>
             </a:r>
           </a:p>
         </p:txBody>
@@ -798,7 +798,7 @@
           <a:lstStyle/>
           <a:p>
             <a:r>
-              <a:t>[7:30–8:15] Exhibit A is accurate. Every number in it is correct, and it would have started a customer-segmentation project. Exhibit B is the same orders split by what was in them, and Premium's margin is unremarkable. The segment was never the problem; it just buys the category that is. Any cut of this data that does not control for category will produce a version of this mistake.</a:t>
+              <a:t>[7:30-8:15] Exhibit A is accurate. Every number in it is correct, and it would have started a customer-segmentation project. Exhibit B is the same orders split by what was in them, and Premium's margin is unremarkable. The segment was never the problem; it just buys the category that is. Any cut of this data that does not control for category will produce a version of this mistake.</a:t>
             </a:r>
           </a:p>
         </p:txBody>
@@ -868,7 +868,7 @@
           <a:lstStyle/>
           <a:p>
             <a:r>
-              <a:t>[8:15–9:00] The COO's investment paid off, and the summary table we have all been reading hides it — 43% pooled across three years reads as a uniformly broken function. The monthly series shows a genuine step change. It also shows the one operational risk worth naming: every festive peak still breaks delivery. That is a capacity issue, not a contract issue, and it is a watch item rather than one of my three recommendations.</a:t>
+              <a:t>[8:15-9:00] The COO's investment paid off, and the summary table we have all been reading hides it. Pooled across three years, 43% reads as a uniformly broken function. The monthly series shows a genuine step change. It also shows the one operational risk worth naming: every festive peak still breaks delivery. That is a capacity issue, not a contract issue, and it is a watch item rather than one of my three recommendations.</a:t>
             </a:r>
           </a:p>
         </p:txBody>
@@ -938,7 +938,7 @@
           <a:lstStyle/>
           <a:p>
             <a:r>
-              <a:t>[9:00–9:05]</a:t>
+              <a:t>[9:00-9:05]</a:t>
             </a:r>
           </a:p>
         </p:txBody>
@@ -1008,7 +1008,7 @@
           <a:lstStyle/>
           <a:p>
             <a:r>
-              <a:t>[9:05–9:45] Three, in order, and I would not start the second before the first. Notice what is not on this list: a regional strategy, a segmentation programme, and cutting delivery investment. The evidence does not support any of them.</a:t>
+              <a:t>[9:05-9:45] Three, in order, and I would not start the second before the first. Notice what is not on this list: a regional strategy, a segmentation programme, and cutting delivery investment. The evidence does not support any of them.</a:t>
             </a:r>
           </a:p>
         </p:txBody>
@@ -1078,7 +1078,7 @@
           <a:lstStyle/>
           <a:p>
             <a:r>
-              <a:t>[9:45–10:00] I would rather you trust the three recommendations because you know what they rest on. Each of the four gaps above maps to something I would ask for before we commit the money. Happy to take questions.</a:t>
+              <a:t>[9:45-10:00] I would rather you trust the three recommendations because you know what they rest on. Each of the four gaps above maps to something I would ask for before we commit the money. Happy to take questions.</a:t>
             </a:r>
           </a:p>
         </p:txBody>
@@ -1148,7 +1148,7 @@
           <a:lstStyle/>
           <a:p>
             <a:r>
-              <a:t>[0:30–0:45] Start with what everyone in the room already agrees on.</a:t>
+              <a:t>[0:30-0:45] Start with what everyone in the room already agrees on.</a:t>
             </a:r>
           </a:p>
         </p:txBody>
@@ -1218,7 +1218,7 @@
           <a:lstStyle/>
           <a:p>
             <a:r>
-              <a:t>[0:45–1:45] The Chief Growth Officer is right that the business is bigger. Revenue nearly doubled. But margin went the other way, and not slightly — it fell by more than a third of where it started. Two separate panels, not one dual-axis chart, because the crossing point of two arbitrary scales would be a coincidence, not a finding. The question for the next ten minutes is not whether we grew. It is what we bought with the growth.</a:t>
+              <a:t>[0:45-1:45] The Chief Growth Officer is right that the business is bigger. Revenue nearly doubled. But margin went the other way, and not slightly: it fell by more than a third of where it started. Two separate panels here, not one dual-axis chart, because the crossing point of two arbitrary scales would be a coincidence, not a finding. The question for the next ten minutes is not whether we grew. It is what we bought with the growth.</a:t>
             </a:r>
           </a:p>
         </p:txBody>
@@ -1288,7 +1288,7 @@
           <a:lstStyle/>
           <a:p>
             <a:r>
-              <a:t>[1:45–2:00]</a:t>
+              <a:t>[1:45-2:00]</a:t>
             </a:r>
           </a:p>
         </p:txBody>
@@ -1358,7 +1358,7 @@
           <a:lstStyle/>
           <a:p>
             <a:r>
-              <a:t>[2:00–3:00] This is the growth programme, measured on its own terms. Per-month figures, because the two windows have to be comparable. Revenue per month rose 77%. Profit per month rose 14%. We did acquire customers and we did enter Tier 2 — the programme did what it said. It also discounted four points deeper to do it. Nothing here says stop growing. It says we are not currently being paid for the growth.</a:t>
+              <a:t>[2:00-3:00] This is the growth programme, measured on its own terms. Per-month figures, because the two windows have to be comparable. Revenue per month rose 77%. Profit per month rose 14%. We did acquire customers and we did enter Tier 2, so the programme did what it said. It also discounted four points deeper to do it. Nothing here says stop growing. It says we are not currently being paid for the growth.</a:t>
             </a:r>
           </a:p>
         </p:txBody>
@@ -1428,7 +1428,7 @@
           <a:lstStyle/>
           <a:p>
             <a:r>
-              <a:t>[3:00–3:10] The obvious answer is that we grew into a worse mix. It is wrong.</a:t>
+              <a:t>[3:00-3:10] The obvious answer is that we grew into a worse mix. It is wrong.</a:t>
             </a:r>
           </a:p>
         </p:txBody>
@@ -1498,7 +1498,7 @@
           <a:lstStyle/>
           <a:p>
             <a:r>
-              <a:t>[3:10–4:15] I want to kill the comfortable explanation first. If the decline were a mix story — we grew the low-margin categories — the fix would be merchandising. It isn't. Holding the 2023 category mix fixed, margin still lands at 7.6%. Nine tenths of the fall happened inside categories we already sold. So: which categories, and why.</a:t>
+              <a:t>[3:10-4:15] I want to kill the comfortable explanation first. If the decline were a mix story, meaning we grew the low-margin categories, the fix would be merchandising. It isn't. Holding the 2023 category mix fixed, margin still lands at 7.6%. Nine tenths of the fall happened inside categories we already sold. So: which categories, and why.</a:t>
             </a:r>
           </a:p>
         </p:txBody>
@@ -1568,7 +1568,7 @@
           <a:lstStyle/>
           <a:p>
             <a:r>
-              <a:t>[4:15–5:00] Here is the concentration. Electronics is not a rounding error — it is half the company, and it is under water. Every other category is healthy. Note the average discount is within a third of a point across all five categories, so this is not a story about Electronics being discounted harder.</a:t>
+              <a:t>[4:15-5:00] Here is the concentration. Electronics is not a rounding error. It is half the company, and it is under water. Every other category is healthy. Note the average discount is within a third of a point across all five categories, so this is not a story about Electronics being discounted harder.</a:t>
             </a:r>
           </a:p>
         </p:txBody>
@@ -1638,7 +1638,7 @@
           <a:lstStyle/>
           <a:p>
             <a:r>
-              <a:t>[5:00–5:45] This is the diagnostic slide. When merchandise costs 94 paise of every rupee recognised, there is almost nothing left to cover delivery, marketing and operations — let alone a discount. That is why the same 13% discount that a Fashion order absorbs comfortably puts an Electronics order into loss.</a:t>
+              <a:t>[5:00-5:45] This is the diagnostic slide. When merchandise costs 94 paise of every rupee recognised, there is almost nothing left to cover delivery, marketing and operations, let alone a discount. That is why the same 13% discount that a Fashion order absorbs comfortably puts an Electronics order into loss.</a:t>
             </a:r>
           </a:p>
         </p:txBody>
@@ -4640,7 +4640,7 @@
     <p:bg>
       <p:bgPr>
         <a:solidFill>
-          <a:srgbClr val="FCFCFB"/>
+          <a:srgbClr val="0D0D0D"/>
         </a:solidFill>
         <a:effectLst/>
       </p:bgPr>
@@ -4661,14 +4661,22 @@
         <p:spPr>
           <a:xfrm>
             <a:off x="0" y="0"/>
-            <a:ext cx="12191695" cy="256032"/>
+            <a:ext cx="12191695" cy="128016"/>
           </a:xfrm>
           <a:prstGeom prst="rect">
             <a:avLst/>
           </a:prstGeom>
-          <a:solidFill>
-            <a:srgbClr val="2A78D6"/>
-          </a:solidFill>
+          <a:gradFill rotWithShape="1">
+            <a:gsLst>
+              <a:gs pos="0">
+                <a:srgbClr val="3987E5"/>
+              </a:gs>
+              <a:gs pos="100000">
+                <a:srgbClr val="9085E9"/>
+              </a:gs>
+            </a:gsLst>
+            <a:lin scaled="0" ang="0"/>
+          </a:gradFill>
           <a:ln>
             <a:noFill/>
           </a:ln>
@@ -4726,7 +4734,7 @@
             <a:r>
               <a:rPr sz="4400" b="1" i="0">
                 <a:solidFill>
-                  <a:srgbClr val="0B0B0B"/>
+                  <a:srgbClr val="FFFFFF"/>
                 </a:solidFill>
                 <a:latin typeface="Calibri"/>
               </a:rPr>
@@ -4742,7 +4750,7 @@
             <a:r>
               <a:rPr sz="2000" b="0" i="0">
                 <a:solidFill>
-                  <a:srgbClr val="52514E"/>
+                  <a:srgbClr val="C3C2B7"/>
                 </a:solidFill>
                 <a:latin typeface="Calibri"/>
               </a:rPr>
@@ -4762,7 +4770,7 @@
                 </a:solidFill>
                 <a:latin typeface="Calibri"/>
               </a:rPr>
-              <a:t>Order-level analysis, 14,970 orders · 6,778 customers · January 2023 – December 2025</a:t>
+              <a:t>Order-level analysis, 14,970 orders · 6,778 customers · January 2023 to December 2025</a:t>
             </a:r>
           </a:p>
           <a:p>
@@ -4797,7 +4805,7 @@
     <p:bg>
       <p:bgPr>
         <a:solidFill>
-          <a:srgbClr val="2A78D6"/>
+          <a:srgbClr val="0D0D0D"/>
         </a:solidFill>
         <a:effectLst/>
       </p:bgPr>
@@ -4811,13 +4819,65 @@
       <p:grpSpPr/>
       <p:sp>
         <p:nvSpPr>
-          <p:cNvPr id="2" name="TextBox 1"/>
+          <p:cNvPr id="2" name="Rectangle 1"/>
+          <p:cNvSpPr/>
+          <p:nvPr/>
+        </p:nvSpPr>
+        <p:spPr>
+          <a:xfrm>
+            <a:off x="566928" y="3035808"/>
+            <a:ext cx="822960" cy="28575"/>
+          </a:xfrm>
+          <a:prstGeom prst="rect">
+            <a:avLst/>
+          </a:prstGeom>
+          <a:gradFill rotWithShape="1">
+            <a:gsLst>
+              <a:gs pos="0">
+                <a:srgbClr val="3987E5"/>
+              </a:gs>
+              <a:gs pos="100000">
+                <a:srgbClr val="9085E9"/>
+              </a:gs>
+            </a:gsLst>
+            <a:lin scaled="0" ang="0"/>
+          </a:gradFill>
+          <a:ln>
+            <a:noFill/>
+          </a:ln>
+          <a:effectLst/>
+        </p:spPr>
+        <p:style>
+          <a:lnRef idx="1">
+            <a:schemeClr val="accent1"/>
+          </a:lnRef>
+          <a:fillRef idx="3">
+            <a:schemeClr val="accent1"/>
+          </a:fillRef>
+          <a:effectRef idx="2">
+            <a:schemeClr val="accent1"/>
+          </a:effectRef>
+          <a:fontRef idx="minor">
+            <a:schemeClr val="lt1"/>
+          </a:fontRef>
+        </p:style>
+        <p:txBody>
+          <a:bodyPr rtlCol="0" anchor="ctr"/>
+          <a:lstStyle/>
+          <a:p>
+            <a:pPr algn="ctr"/>
+          </a:p>
+        </p:txBody>
+      </p:sp>
+      <p:sp>
+        <p:nvSpPr>
+          <p:cNvPr id="3" name="TextBox 2"/>
           <p:cNvSpPr txBox="1"/>
           <p:nvPr/>
         </p:nvSpPr>
         <p:spPr>
           <a:xfrm>
-            <a:off x="566928" y="2377440"/>
+            <a:off x="566928" y="2148840"/>
             <a:ext cx="11057839" cy="2194560"/>
           </a:xfrm>
           <a:prstGeom prst="rect">
@@ -4826,7 +4886,7 @@
           <a:noFill/>
         </p:spPr>
         <p:txBody>
-          <a:bodyPr wrap="square" anchor="ctr">
+          <a:bodyPr wrap="square" anchor="t">
             <a:spAutoFit/>
           </a:bodyPr>
           <a:lstStyle/>
@@ -4839,7 +4899,7 @@
             <a:r>
               <a:rPr sz="1400" b="1" i="0">
                 <a:solidFill>
-                  <a:srgbClr val="FFFFFF"/>
+                  <a:srgbClr val="3987E5"/>
                 </a:solidFill>
                 <a:latin typeface="Calibri"/>
               </a:rPr>
@@ -4878,7 +4938,7 @@
     <p:bg>
       <p:bgPr>
         <a:solidFill>
-          <a:srgbClr val="FCFCFB"/>
+          <a:srgbClr val="1A1A19"/>
         </a:solidFill>
         <a:effectLst/>
       </p:bgPr>
@@ -4920,7 +4980,7 @@
             <a:r>
               <a:rPr sz="2500" b="1" i="0">
                 <a:solidFill>
-                  <a:srgbClr val="0B0B0B"/>
+                  <a:srgbClr val="FFFFFF"/>
                 </a:solidFill>
                 <a:latin typeface="Calibri"/>
               </a:rPr>
@@ -4936,7 +4996,7 @@
             <a:r>
               <a:rPr sz="1300" b="0" i="0">
                 <a:solidFill>
-                  <a:srgbClr val="52514E"/>
+                  <a:srgbClr val="C3C2B7"/>
                 </a:solidFill>
                 <a:latin typeface="Calibri"/>
               </a:rPr>
@@ -4959,9 +5019,17 @@
           <a:prstGeom prst="rect">
             <a:avLst/>
           </a:prstGeom>
-          <a:solidFill>
-            <a:srgbClr val="2A78D6"/>
-          </a:solidFill>
+          <a:gradFill rotWithShape="1">
+            <a:gsLst>
+              <a:gs pos="0">
+                <a:srgbClr val="3987E5"/>
+              </a:gs>
+              <a:gs pos="100000">
+                <a:srgbClr val="9085E9"/>
+              </a:gs>
+            </a:gsLst>
+            <a:lin scaled="0" ang="0"/>
+          </a:gradFill>
           <a:ln>
             <a:noFill/>
           </a:ln>
@@ -5043,11 +5111,11 @@
             <a:r>
               <a:rPr sz="1400" b="0" i="0">
                 <a:solidFill>
-                  <a:srgbClr val="52514E"/>
+                  <a:srgbClr val="C3C2B7"/>
                 </a:solidFill>
                 <a:latin typeface="Calibri"/>
               </a:rPr>
-              <a:t>Flash Deals — average discount 24%, 10% of revenue — are the only promotion type with a negative margin (-2.0%). Un-promoted demand earns 15.2%.</a:t>
+              <a:t>Flash Deals (average discount 24%, 10% of revenue) are the only promotion type with a negative margin, at -2.0%. Un-promoted demand earns 15.2%.</a:t>
             </a:r>
           </a:p>
         </p:txBody>
@@ -5066,7 +5134,7 @@
     <p:bg>
       <p:bgPr>
         <a:solidFill>
-          <a:srgbClr val="FCFCFB"/>
+          <a:srgbClr val="1A1A19"/>
         </a:solidFill>
         <a:effectLst/>
       </p:bgPr>
@@ -5108,7 +5176,7 @@
             <a:r>
               <a:rPr sz="2500" b="1" i="0">
                 <a:solidFill>
-                  <a:srgbClr val="0B0B0B"/>
+                  <a:srgbClr val="FFFFFF"/>
                 </a:solidFill>
                 <a:latin typeface="Calibri"/>
               </a:rPr>
@@ -5124,7 +5192,7 @@
             <a:r>
               <a:rPr sz="1300" b="0" i="0">
                 <a:solidFill>
-                  <a:srgbClr val="52514E"/>
+                  <a:srgbClr val="C3C2B7"/>
                 </a:solidFill>
                 <a:latin typeface="Calibri"/>
               </a:rPr>
@@ -5147,9 +5215,17 @@
           <a:prstGeom prst="rect">
             <a:avLst/>
           </a:prstGeom>
-          <a:solidFill>
-            <a:srgbClr val="2A78D6"/>
-          </a:solidFill>
+          <a:gradFill rotWithShape="1">
+            <a:gsLst>
+              <a:gs pos="0">
+                <a:srgbClr val="3987E5"/>
+              </a:gs>
+              <a:gs pos="100000">
+                <a:srgbClr val="9085E9"/>
+              </a:gs>
+            </a:gsLst>
+            <a:lin scaled="0" ang="0"/>
+          </a:gradFill>
           <a:ln>
             <a:noFill/>
           </a:ln>
@@ -5231,7 +5307,7 @@
             <a:r>
               <a:rPr sz="1400" b="0" i="0">
                 <a:solidFill>
-                  <a:srgbClr val="52514E"/>
+                  <a:srgbClr val="C3C2B7"/>
                 </a:solidFill>
                 <a:latin typeface="Calibri"/>
               </a:rPr>
@@ -5254,7 +5330,7 @@
     <p:bg>
       <p:bgPr>
         <a:solidFill>
-          <a:srgbClr val="FCFCFB"/>
+          <a:srgbClr val="1A1A19"/>
         </a:solidFill>
         <a:effectLst/>
       </p:bgPr>
@@ -5296,7 +5372,7 @@
             <a:r>
               <a:rPr sz="2500" b="1" i="0">
                 <a:solidFill>
-                  <a:srgbClr val="0B0B0B"/>
+                  <a:srgbClr val="FFFFFF"/>
                 </a:solidFill>
                 <a:latin typeface="Calibri"/>
               </a:rPr>
@@ -5312,7 +5388,7 @@
             <a:r>
               <a:rPr sz="1300" b="0" i="0">
                 <a:solidFill>
-                  <a:srgbClr val="52514E"/>
+                  <a:srgbClr val="C3C2B7"/>
                 </a:solidFill>
                 <a:latin typeface="Calibri"/>
               </a:rPr>
@@ -5335,9 +5411,17 @@
           <a:prstGeom prst="rect">
             <a:avLst/>
           </a:prstGeom>
-          <a:solidFill>
-            <a:srgbClr val="2A78D6"/>
-          </a:solidFill>
+          <a:gradFill rotWithShape="1">
+            <a:gsLst>
+              <a:gs pos="0">
+                <a:srgbClr val="3987E5"/>
+              </a:gs>
+              <a:gs pos="100000">
+                <a:srgbClr val="9085E9"/>
+              </a:gs>
+            </a:gsLst>
+            <a:lin scaled="0" ang="0"/>
+          </a:gradFill>
           <a:ln>
             <a:noFill/>
           </a:ln>
@@ -5419,11 +5503,11 @@
             <a:r>
               <a:rPr sz="1400" b="0" i="0">
                 <a:solidFill>
-                  <a:srgbClr val="52514E"/>
+                  <a:srgbClr val="C3C2B7"/>
                 </a:solidFill>
                 <a:latin typeface="Calibri"/>
               </a:rPr>
-              <a:t>Premium's pooled margin is 2.9%. Outside Electronics it is 21.9% — ordinary. 66% of Premium's revenue is Electronics.</a:t>
+              <a:t>Premium's pooled margin is 2.9%. Outside Electronics it is 21.9%, which is ordinary. 66% of Premium's revenue is Electronics.</a:t>
             </a:r>
           </a:p>
         </p:txBody>
@@ -5442,7 +5526,7 @@
     <p:bg>
       <p:bgPr>
         <a:solidFill>
-          <a:srgbClr val="FCFCFB"/>
+          <a:srgbClr val="1A1A19"/>
         </a:solidFill>
         <a:effectLst/>
       </p:bgPr>
@@ -5484,11 +5568,11 @@
             <a:r>
               <a:rPr sz="2500" b="1" i="0">
                 <a:solidFill>
-                  <a:srgbClr val="0B0B0B"/>
+                  <a:srgbClr val="FFFFFF"/>
                 </a:solidFill>
                 <a:latin typeface="Calibri"/>
               </a:rPr>
-              <a:t>One thing is already working — and it is not where we were about to cut</a:t>
+              <a:t>One thing is already working, and it is not where we were about to cut</a:t>
             </a:r>
           </a:p>
           <a:p>
@@ -5500,11 +5584,11 @@
             <a:r>
               <a:rPr sz="1300" b="0" i="0">
                 <a:solidFill>
-                  <a:srgbClr val="52514E"/>
+                  <a:srgbClr val="C3C2B7"/>
                 </a:solidFill>
                 <a:latin typeface="Calibri"/>
               </a:rPr>
-              <a:t>On-time delivery went 34% → 55% after the January 2025 logistics contract; complaints fell 10.1% → 6.9%</a:t>
+              <a:t>On-time delivery went from 34% to 55% after the January 2025 logistics contract; complaints fell from 10.1% to 6.9%</a:t>
             </a:r>
           </a:p>
         </p:txBody>
@@ -5523,9 +5607,17 @@
           <a:prstGeom prst="rect">
             <a:avLst/>
           </a:prstGeom>
-          <a:solidFill>
-            <a:srgbClr val="2A78D6"/>
-          </a:solidFill>
+          <a:gradFill rotWithShape="1">
+            <a:gsLst>
+              <a:gs pos="0">
+                <a:srgbClr val="3987E5"/>
+              </a:gs>
+              <a:gs pos="100000">
+                <a:srgbClr val="9085E9"/>
+              </a:gs>
+            </a:gsLst>
+            <a:lin scaled="0" ang="0"/>
+          </a:gradFill>
           <a:ln>
             <a:noFill/>
           </a:ln>
@@ -5607,11 +5699,11 @@
             <a:r>
               <a:rPr sz="1400" b="0" i="0">
                 <a:solidFill>
-                  <a:srgbClr val="52514E"/>
+                  <a:srgbClr val="C3C2B7"/>
                 </a:solidFill>
                 <a:latin typeface="Calibri"/>
               </a:rPr>
-              <a:t>It cost about ₹45 more per order. The company-wide average of 43% hides both the step change and the festive collapse — peak on-time was still only 34% last October–November.</a:t>
+              <a:t>It cost about ₹45 more per order. The company-wide average of 43% hides both the step change and the festive collapse: peak on-time was still only 34% last October and November.</a:t>
             </a:r>
           </a:p>
         </p:txBody>
@@ -5630,7 +5722,7 @@
     <p:bg>
       <p:bgPr>
         <a:solidFill>
-          <a:srgbClr val="2A78D6"/>
+          <a:srgbClr val="0D0D0D"/>
         </a:solidFill>
         <a:effectLst/>
       </p:bgPr>
@@ -5644,157 +5736,29 @@
       <p:grpSpPr/>
       <p:sp>
         <p:nvSpPr>
-          <p:cNvPr id="2" name="TextBox 1"/>
-          <p:cNvSpPr txBox="1"/>
+          <p:cNvPr id="2" name="Rectangle 1"/>
+          <p:cNvSpPr/>
           <p:nvPr/>
         </p:nvSpPr>
         <p:spPr>
           <a:xfrm>
-            <a:off x="566928" y="2377440"/>
-            <a:ext cx="11057839" cy="2194560"/>
+            <a:off x="566928" y="3035808"/>
+            <a:ext cx="822960" cy="28575"/>
           </a:xfrm>
           <a:prstGeom prst="rect">
             <a:avLst/>
           </a:prstGeom>
-          <a:noFill/>
-        </p:spPr>
-        <p:txBody>
-          <a:bodyPr wrap="square" anchor="ctr">
-            <a:spAutoFit/>
-          </a:bodyPr>
-          <a:lstStyle/>
-          <a:p>
-            <a:pPr algn="l">
-              <a:spcAft>
-                <a:spcPts val="1000"/>
-              </a:spcAft>
-            </a:pPr>
-            <a:r>
-              <a:rPr sz="1400" b="1" i="0">
-                <a:solidFill>
-                  <a:srgbClr val="FFFFFF"/>
-                </a:solidFill>
-                <a:latin typeface="Calibri"/>
-              </a:rPr>
-              <a:t>DECISION</a:t>
-            </a:r>
-          </a:p>
-          <a:p>
-            <a:pPr algn="l">
-              <a:spcAft>
-                <a:spcPts val="0"/>
-              </a:spcAft>
-            </a:pPr>
-            <a:r>
-              <a:rPr sz="3600" b="1" i="0">
-                <a:solidFill>
-                  <a:srgbClr val="FFFFFF"/>
-                </a:solidFill>
-                <a:latin typeface="Calibri"/>
-              </a:rPr>
-              <a:t>Three actions, in priority order</a:t>
-            </a:r>
-          </a:p>
-        </p:txBody>
-      </p:sp>
-    </p:spTree>
-  </p:cSld>
-  <p:clrMapOvr>
-    <a:masterClrMapping/>
-  </p:clrMapOvr>
-</p:sld>
-</file>
-
-<file path=ppt/slides/slide16.xml><?xml version="1.0" encoding="utf-8"?>
-<p:sld xmlns:a="http://schemas.openxmlformats.org/drawingml/2006/main" xmlns:p="http://schemas.openxmlformats.org/presentationml/2006/main" xmlns:r="http://schemas.openxmlformats.org/officeDocument/2006/relationships">
-  <p:cSld>
-    <p:bg>
-      <p:bgPr>
-        <a:solidFill>
-          <a:srgbClr val="FCFCFB"/>
-        </a:solidFill>
-        <a:effectLst/>
-      </p:bgPr>
-    </p:bg>
-    <p:spTree>
-      <p:nvGrpSpPr>
-        <p:cNvPr id="1" name=""/>
-        <p:cNvGrpSpPr/>
-        <p:nvPr/>
-      </p:nvGrpSpPr>
-      <p:grpSpPr/>
-      <p:sp>
-        <p:nvSpPr>
-          <p:cNvPr id="2" name="TextBox 1"/>
-          <p:cNvSpPr txBox="1"/>
-          <p:nvPr/>
-        </p:nvSpPr>
-        <p:spPr>
-          <a:xfrm>
-            <a:off x="566928" y="457200"/>
-            <a:ext cx="11057839" cy="914400"/>
-          </a:xfrm>
-          <a:prstGeom prst="rect">
-            <a:avLst/>
-          </a:prstGeom>
-          <a:noFill/>
-        </p:spPr>
-        <p:txBody>
-          <a:bodyPr wrap="square" anchor="t">
-            <a:spAutoFit/>
-          </a:bodyPr>
-          <a:lstStyle/>
-          <a:p>
-            <a:pPr algn="l">
-              <a:spcAft>
-                <a:spcPts val="400"/>
-              </a:spcAft>
-            </a:pPr>
-            <a:r>
-              <a:rPr sz="2600" b="1" i="0">
-                <a:solidFill>
-                  <a:srgbClr val="0B0B0B"/>
-                </a:solidFill>
-                <a:latin typeface="Calibri"/>
-              </a:rPr>
-              <a:t>Where to invest, where to change course</a:t>
-            </a:r>
-          </a:p>
-          <a:p>
-            <a:pPr algn="l">
-              <a:spcAft>
-                <a:spcPts val="0"/>
-              </a:spcAft>
-            </a:pPr>
-            <a:r>
-              <a:rPr sz="1400" b="0" i="0">
-                <a:solidFill>
-                  <a:srgbClr val="52514E"/>
-                </a:solidFill>
-                <a:latin typeface="Calibri"/>
-              </a:rPr>
-              <a:t>Each sized by the contribution at stake, each with the one thing we would want to know before committing</a:t>
-            </a:r>
-          </a:p>
-        </p:txBody>
-      </p:sp>
-      <p:sp>
-        <p:nvSpPr>
-          <p:cNvPr id="3" name="Rectangle 2"/>
-          <p:cNvSpPr/>
-          <p:nvPr/>
-        </p:nvSpPr>
-        <p:spPr>
-          <a:xfrm>
-            <a:off x="566928" y="1325880"/>
-            <a:ext cx="1280160" cy="28575"/>
-          </a:xfrm>
-          <a:prstGeom prst="rect">
-            <a:avLst/>
-          </a:prstGeom>
-          <a:solidFill>
-            <a:srgbClr val="2A78D6"/>
-          </a:solidFill>
+          <a:gradFill rotWithShape="1">
+            <a:gsLst>
+              <a:gs pos="0">
+                <a:srgbClr val="3987E5"/>
+              </a:gs>
+              <a:gs pos="100000">
+                <a:srgbClr val="9085E9"/>
+              </a:gs>
+            </a:gsLst>
+            <a:lin scaled="0" ang="0"/>
+          </a:gradFill>
           <a:ln>
             <a:noFill/>
           </a:ln>
@@ -5824,6 +5788,194 @@
       </p:sp>
       <p:sp>
         <p:nvSpPr>
+          <p:cNvPr id="3" name="TextBox 2"/>
+          <p:cNvSpPr txBox="1"/>
+          <p:nvPr/>
+        </p:nvSpPr>
+        <p:spPr>
+          <a:xfrm>
+            <a:off x="566928" y="2148840"/>
+            <a:ext cx="11057839" cy="2194560"/>
+          </a:xfrm>
+          <a:prstGeom prst="rect">
+            <a:avLst/>
+          </a:prstGeom>
+          <a:noFill/>
+        </p:spPr>
+        <p:txBody>
+          <a:bodyPr wrap="square" anchor="t">
+            <a:spAutoFit/>
+          </a:bodyPr>
+          <a:lstStyle/>
+          <a:p>
+            <a:pPr algn="l">
+              <a:spcAft>
+                <a:spcPts val="1000"/>
+              </a:spcAft>
+            </a:pPr>
+            <a:r>
+              <a:rPr sz="1400" b="1" i="0">
+                <a:solidFill>
+                  <a:srgbClr val="3987E5"/>
+                </a:solidFill>
+                <a:latin typeface="Calibri"/>
+              </a:rPr>
+              <a:t>DECISION</a:t>
+            </a:r>
+          </a:p>
+          <a:p>
+            <a:pPr algn="l">
+              <a:spcAft>
+                <a:spcPts val="0"/>
+              </a:spcAft>
+            </a:pPr>
+            <a:r>
+              <a:rPr sz="3600" b="1" i="0">
+                <a:solidFill>
+                  <a:srgbClr val="FFFFFF"/>
+                </a:solidFill>
+                <a:latin typeface="Calibri"/>
+              </a:rPr>
+              <a:t>Three actions, in priority order</a:t>
+            </a:r>
+          </a:p>
+        </p:txBody>
+      </p:sp>
+    </p:spTree>
+  </p:cSld>
+  <p:clrMapOvr>
+    <a:masterClrMapping/>
+  </p:clrMapOvr>
+</p:sld>
+</file>
+
+<file path=ppt/slides/slide16.xml><?xml version="1.0" encoding="utf-8"?>
+<p:sld xmlns:a="http://schemas.openxmlformats.org/drawingml/2006/main" xmlns:p="http://schemas.openxmlformats.org/presentationml/2006/main" xmlns:r="http://schemas.openxmlformats.org/officeDocument/2006/relationships">
+  <p:cSld>
+    <p:bg>
+      <p:bgPr>
+        <a:solidFill>
+          <a:srgbClr val="1A1A19"/>
+        </a:solidFill>
+        <a:effectLst/>
+      </p:bgPr>
+    </p:bg>
+    <p:spTree>
+      <p:nvGrpSpPr>
+        <p:cNvPr id="1" name=""/>
+        <p:cNvGrpSpPr/>
+        <p:nvPr/>
+      </p:nvGrpSpPr>
+      <p:grpSpPr/>
+      <p:sp>
+        <p:nvSpPr>
+          <p:cNvPr id="2" name="TextBox 1"/>
+          <p:cNvSpPr txBox="1"/>
+          <p:nvPr/>
+        </p:nvSpPr>
+        <p:spPr>
+          <a:xfrm>
+            <a:off x="566928" y="457200"/>
+            <a:ext cx="11057839" cy="914400"/>
+          </a:xfrm>
+          <a:prstGeom prst="rect">
+            <a:avLst/>
+          </a:prstGeom>
+          <a:noFill/>
+        </p:spPr>
+        <p:txBody>
+          <a:bodyPr wrap="square" anchor="t">
+            <a:spAutoFit/>
+          </a:bodyPr>
+          <a:lstStyle/>
+          <a:p>
+            <a:pPr algn="l">
+              <a:spcAft>
+                <a:spcPts val="400"/>
+              </a:spcAft>
+            </a:pPr>
+            <a:r>
+              <a:rPr sz="2600" b="1" i="0">
+                <a:solidFill>
+                  <a:srgbClr val="FFFFFF"/>
+                </a:solidFill>
+                <a:latin typeface="Calibri"/>
+              </a:rPr>
+              <a:t>Where to invest, where to change course</a:t>
+            </a:r>
+          </a:p>
+          <a:p>
+            <a:pPr algn="l">
+              <a:spcAft>
+                <a:spcPts val="0"/>
+              </a:spcAft>
+            </a:pPr>
+            <a:r>
+              <a:rPr sz="1400" b="0" i="0">
+                <a:solidFill>
+                  <a:srgbClr val="C3C2B7"/>
+                </a:solidFill>
+                <a:latin typeface="Calibri"/>
+              </a:rPr>
+              <a:t>Each sized by the contribution at stake, each with the one thing we would want to know before committing</a:t>
+            </a:r>
+          </a:p>
+        </p:txBody>
+      </p:sp>
+      <p:sp>
+        <p:nvSpPr>
+          <p:cNvPr id="3" name="Rectangle 2"/>
+          <p:cNvSpPr/>
+          <p:nvPr/>
+        </p:nvSpPr>
+        <p:spPr>
+          <a:xfrm>
+            <a:off x="566928" y="1325880"/>
+            <a:ext cx="1280160" cy="28575"/>
+          </a:xfrm>
+          <a:prstGeom prst="rect">
+            <a:avLst/>
+          </a:prstGeom>
+          <a:gradFill rotWithShape="1">
+            <a:gsLst>
+              <a:gs pos="0">
+                <a:srgbClr val="3987E5"/>
+              </a:gs>
+              <a:gs pos="100000">
+                <a:srgbClr val="9085E9"/>
+              </a:gs>
+            </a:gsLst>
+            <a:lin scaled="0" ang="0"/>
+          </a:gradFill>
+          <a:ln>
+            <a:noFill/>
+          </a:ln>
+          <a:effectLst/>
+        </p:spPr>
+        <p:style>
+          <a:lnRef idx="1">
+            <a:schemeClr val="accent1"/>
+          </a:lnRef>
+          <a:fillRef idx="3">
+            <a:schemeClr val="accent1"/>
+          </a:fillRef>
+          <a:effectRef idx="2">
+            <a:schemeClr val="accent1"/>
+          </a:effectRef>
+          <a:fontRef idx="minor">
+            <a:schemeClr val="lt1"/>
+          </a:fontRef>
+        </p:style>
+        <p:txBody>
+          <a:bodyPr rtlCol="0" anchor="ctr"/>
+          <a:lstStyle/>
+          <a:p>
+            <a:pPr algn="ctr"/>
+          </a:p>
+        </p:txBody>
+      </p:sp>
+      <p:sp>
+        <p:nvSpPr>
           <p:cNvPr id="4" name="Rectangle 3"/>
           <p:cNvSpPr/>
           <p:nvPr/>
@@ -5837,11 +5989,11 @@
             <a:avLst/>
           </a:prstGeom>
           <a:solidFill>
-            <a:srgbClr val="FFFFFF"/>
+            <a:srgbClr val="242422"/>
           </a:solidFill>
           <a:ln w="9525">
             <a:solidFill>
-              <a:srgbClr val="E1E0D9"/>
+              <a:srgbClr val="383835"/>
             </a:solidFill>
           </a:ln>
           <a:effectLst/>
@@ -5958,7 +6110,7 @@
             <a:r>
               <a:rPr sz="1500" b="1" i="0">
                 <a:solidFill>
-                  <a:srgbClr val="0B0B0B"/>
+                  <a:srgbClr val="FFFFFF"/>
                 </a:solidFill>
                 <a:latin typeface="Calibri"/>
               </a:rPr>
@@ -5990,7 +6142,7 @@
             <a:r>
               <a:rPr sz="1100" b="0" i="0">
                 <a:solidFill>
-                  <a:srgbClr val="52514E"/>
+                  <a:srgbClr val="C3C2B7"/>
                 </a:solidFill>
                 <a:latin typeface="Calibri"/>
               </a:rPr>
@@ -6022,7 +6174,7 @@
             <a:r>
               <a:rPr sz="1100" b="0" i="0">
                 <a:solidFill>
-                  <a:srgbClr val="52514E"/>
+                  <a:srgbClr val="C3C2B7"/>
                 </a:solidFill>
                 <a:latin typeface="Calibri"/>
               </a:rPr>
@@ -6054,7 +6206,7 @@
             <a:r>
               <a:rPr sz="1100" b="0" i="0">
                 <a:solidFill>
-                  <a:srgbClr val="52514E"/>
+                  <a:srgbClr val="C3C2B7"/>
                 </a:solidFill>
                 <a:latin typeface="Calibri"/>
               </a:rPr>
@@ -6086,7 +6238,7 @@
             <a:r>
               <a:rPr sz="1100" b="0" i="0">
                 <a:solidFill>
-                  <a:srgbClr val="52514E"/>
+                  <a:srgbClr val="C3C2B7"/>
                 </a:solidFill>
                 <a:latin typeface="Calibri"/>
               </a:rPr>
@@ -6110,11 +6262,11 @@
             <a:avLst/>
           </a:prstGeom>
           <a:solidFill>
-            <a:srgbClr val="FFFFFF"/>
+            <a:srgbClr val="242422"/>
           </a:solidFill>
           <a:ln w="9525">
             <a:solidFill>
-              <a:srgbClr val="E1E0D9"/>
+              <a:srgbClr val="383835"/>
             </a:solidFill>
           </a:ln>
           <a:effectLst/>
@@ -6231,7 +6383,7 @@
             <a:r>
               <a:rPr sz="1500" b="1" i="0">
                 <a:solidFill>
-                  <a:srgbClr val="0B0B0B"/>
+                  <a:srgbClr val="FFFFFF"/>
                 </a:solidFill>
                 <a:latin typeface="Calibri"/>
               </a:rPr>
@@ -6263,7 +6415,7 @@
             <a:r>
               <a:rPr sz="1100" b="0" i="0">
                 <a:solidFill>
-                  <a:srgbClr val="52514E"/>
+                  <a:srgbClr val="C3C2B7"/>
                 </a:solidFill>
                 <a:latin typeface="Calibri"/>
               </a:rPr>
@@ -6295,11 +6447,11 @@
             <a:r>
               <a:rPr sz="1100" b="0" i="0">
                 <a:solidFill>
-                  <a:srgbClr val="52514E"/>
+                  <a:srgbClr val="C3C2B7"/>
                 </a:solidFill>
                 <a:latin typeface="Calibri"/>
               </a:rPr>
-              <a:t>enforceable in the pricing system next quarter — a rule, not a bet</a:t>
+              <a:t>enforceable in the pricing system next quarter. A rule, not a bet</a:t>
             </a:r>
           </a:p>
           <a:p>
@@ -6327,7 +6479,7 @@
             <a:r>
               <a:rPr sz="1100" b="0" i="0">
                 <a:solidFill>
-                  <a:srgbClr val="52514E"/>
+                  <a:srgbClr val="C3C2B7"/>
                 </a:solidFill>
                 <a:latin typeface="Calibri"/>
               </a:rPr>
@@ -6359,11 +6511,11 @@
             <a:r>
               <a:rPr sz="1100" b="0" i="0">
                 <a:solidFill>
-                  <a:srgbClr val="52514E"/>
+                  <a:srgbClr val="C3C2B7"/>
                 </a:solidFill>
                 <a:latin typeface="Calibri"/>
               </a:rPr>
-              <a:t>promotion incrementality — what these orders would have done unpromoted</a:t>
+              <a:t>promotion incrementality, meaning what these orders would have done unpromoted</a:t>
             </a:r>
           </a:p>
         </p:txBody>
@@ -6383,11 +6535,11 @@
             <a:avLst/>
           </a:prstGeom>
           <a:solidFill>
-            <a:srgbClr val="FFFFFF"/>
+            <a:srgbClr val="242422"/>
           </a:solidFill>
           <a:ln w="9525">
             <a:solidFill>
-              <a:srgbClr val="E1E0D9"/>
+              <a:srgbClr val="383835"/>
             </a:solidFill>
           </a:ln>
           <a:effectLst/>
@@ -6504,7 +6656,7 @@
             <a:r>
               <a:rPr sz="1500" b="1" i="0">
                 <a:solidFill>
-                  <a:srgbClr val="0B0B0B"/>
+                  <a:srgbClr val="FFFFFF"/>
                 </a:solidFill>
                 <a:latin typeface="Calibri"/>
               </a:rPr>
@@ -6536,7 +6688,7 @@
             <a:r>
               <a:rPr sz="1100" b="0" i="0">
                 <a:solidFill>
-                  <a:srgbClr val="52514E"/>
+                  <a:srgbClr val="C3C2B7"/>
                 </a:solidFill>
                 <a:latin typeface="Calibri"/>
               </a:rPr>
@@ -6568,11 +6720,11 @@
             <a:r>
               <a:rPr sz="1100" b="0" i="0">
                 <a:solidFill>
-                  <a:srgbClr val="52514E"/>
+                  <a:srgbClr val="C3C2B7"/>
                 </a:solidFill>
                 <a:latin typeface="Calibri"/>
               </a:rPr>
-              <a:t>protects growth while stopping the purchase of near-zero-contribution revenue</a:t>
+              <a:t>protects growth while it stops us buying revenue that carries almost no contribution</a:t>
             </a:r>
           </a:p>
           <a:p>
@@ -6600,7 +6752,7 @@
             <a:r>
               <a:rPr sz="1100" b="0" i="0">
                 <a:solidFill>
-                  <a:srgbClr val="52514E"/>
+                  <a:srgbClr val="C3C2B7"/>
                 </a:solidFill>
                 <a:latin typeface="Calibri"/>
               </a:rPr>
@@ -6632,7 +6784,7 @@
             <a:r>
               <a:rPr sz="1100" b="0" i="0">
                 <a:solidFill>
-                  <a:srgbClr val="52514E"/>
+                  <a:srgbClr val="C3C2B7"/>
                 </a:solidFill>
                 <a:latin typeface="Calibri"/>
               </a:rPr>
@@ -6655,7 +6807,7 @@
     <p:bg>
       <p:bgPr>
         <a:solidFill>
-          <a:srgbClr val="FCFCFB"/>
+          <a:srgbClr val="1A1A19"/>
         </a:solidFill>
         <a:effectLst/>
       </p:bgPr>
@@ -6697,7 +6849,7 @@
             <a:r>
               <a:rPr sz="2500" b="1" i="0">
                 <a:solidFill>
-                  <a:srgbClr val="0B0B0B"/>
+                  <a:srgbClr val="FFFFFF"/>
                 </a:solidFill>
                 <a:latin typeface="Calibri"/>
               </a:rPr>
@@ -6713,7 +6865,7 @@
             <a:r>
               <a:rPr sz="1300" b="0" i="0">
                 <a:solidFill>
-                  <a:srgbClr val="52514E"/>
+                  <a:srgbClr val="C3C2B7"/>
                 </a:solidFill>
                 <a:latin typeface="Calibri"/>
               </a:rPr>
@@ -6736,9 +6888,17 @@
           <a:prstGeom prst="rect">
             <a:avLst/>
           </a:prstGeom>
-          <a:solidFill>
-            <a:srgbClr val="2A78D6"/>
-          </a:solidFill>
+          <a:gradFill rotWithShape="1">
+            <a:gsLst>
+              <a:gs pos="0">
+                <a:srgbClr val="3987E5"/>
+              </a:gs>
+              <a:gs pos="100000">
+                <a:srgbClr val="9085E9"/>
+              </a:gs>
+            </a:gsLst>
+            <a:lin scaled="0" ang="0"/>
+          </a:gradFill>
           <a:ln>
             <a:noFill/>
           </a:ln>
@@ -6796,11 +6956,11 @@
             <a:r>
               <a:rPr sz="1800" b="0" i="0">
                 <a:solidFill>
-                  <a:srgbClr val="52514E"/>
+                  <a:srgbClr val="C3C2B7"/>
                 </a:solidFill>
                 <a:latin typeface="Calibri"/>
               </a:rPr>
-              <a:t>Association, not causation. Late delivery correlates with lower ratings and triples the complaint rate — that is not proof that lateness causes either.</a:t>
+              <a:t>Association, not causation. Late delivery correlates with lower ratings and triples the complaint rate. That is not proof that lateness causes either.</a:t>
             </a:r>
           </a:p>
           <a:p>
@@ -6812,7 +6972,7 @@
             <a:r>
               <a:rPr sz="1800" b="0" i="0">
                 <a:solidFill>
-                  <a:srgbClr val="52514E"/>
+                  <a:srgbClr val="C3C2B7"/>
                 </a:solidFill>
                 <a:latin typeface="Calibri"/>
               </a:rPr>
@@ -6828,7 +6988,7 @@
             <a:r>
               <a:rPr sz="1800" b="0" i="0">
                 <a:solidFill>
-                  <a:srgbClr val="52514E"/>
+                  <a:srgbClr val="C3C2B7"/>
                 </a:solidFill>
                 <a:latin typeface="Calibri"/>
               </a:rPr>
@@ -6844,7 +7004,7 @@
             <a:r>
               <a:rPr sz="1800" b="0" i="0">
                 <a:solidFill>
-                  <a:srgbClr val="52514E"/>
+                  <a:srgbClr val="C3C2B7"/>
                 </a:solidFill>
                 <a:latin typeface="Calibri"/>
               </a:rPr>
@@ -6860,7 +7020,7 @@
             <a:r>
               <a:rPr sz="1800" b="0" i="0">
                 <a:solidFill>
-                  <a:srgbClr val="52514E"/>
+                  <a:srgbClr val="C3C2B7"/>
                 </a:solidFill>
                 <a:latin typeface="Calibri"/>
               </a:rPr>
@@ -6883,7 +7043,7 @@
     <p:bg>
       <p:bgPr>
         <a:solidFill>
-          <a:srgbClr val="2A78D6"/>
+          <a:srgbClr val="0D0D0D"/>
         </a:solidFill>
         <a:effectLst/>
       </p:bgPr>
@@ -6897,13 +7057,65 @@
       <p:grpSpPr/>
       <p:sp>
         <p:nvSpPr>
-          <p:cNvPr id="2" name="TextBox 1"/>
+          <p:cNvPr id="2" name="Rectangle 1"/>
+          <p:cNvSpPr/>
+          <p:nvPr/>
+        </p:nvSpPr>
+        <p:spPr>
+          <a:xfrm>
+            <a:off x="566928" y="3035808"/>
+            <a:ext cx="822960" cy="28575"/>
+          </a:xfrm>
+          <a:prstGeom prst="rect">
+            <a:avLst/>
+          </a:prstGeom>
+          <a:gradFill rotWithShape="1">
+            <a:gsLst>
+              <a:gs pos="0">
+                <a:srgbClr val="3987E5"/>
+              </a:gs>
+              <a:gs pos="100000">
+                <a:srgbClr val="9085E9"/>
+              </a:gs>
+            </a:gsLst>
+            <a:lin scaled="0" ang="0"/>
+          </a:gradFill>
+          <a:ln>
+            <a:noFill/>
+          </a:ln>
+          <a:effectLst/>
+        </p:spPr>
+        <p:style>
+          <a:lnRef idx="1">
+            <a:schemeClr val="accent1"/>
+          </a:lnRef>
+          <a:fillRef idx="3">
+            <a:schemeClr val="accent1"/>
+          </a:fillRef>
+          <a:effectRef idx="2">
+            <a:schemeClr val="accent1"/>
+          </a:effectRef>
+          <a:fontRef idx="minor">
+            <a:schemeClr val="lt1"/>
+          </a:fontRef>
+        </p:style>
+        <p:txBody>
+          <a:bodyPr rtlCol="0" anchor="ctr"/>
+          <a:lstStyle/>
+          <a:p>
+            <a:pPr algn="ctr"/>
+          </a:p>
+        </p:txBody>
+      </p:sp>
+      <p:sp>
+        <p:nvSpPr>
+          <p:cNvPr id="3" name="TextBox 2"/>
           <p:cNvSpPr txBox="1"/>
           <p:nvPr/>
         </p:nvSpPr>
         <p:spPr>
           <a:xfrm>
-            <a:off x="566928" y="2377440"/>
+            <a:off x="566928" y="2148840"/>
             <a:ext cx="11057839" cy="2194560"/>
           </a:xfrm>
           <a:prstGeom prst="rect">
@@ -6912,7 +7124,7 @@
           <a:noFill/>
         </p:spPr>
         <p:txBody>
-          <a:bodyPr wrap="square" anchor="ctr">
+          <a:bodyPr wrap="square" anchor="t">
             <a:spAutoFit/>
           </a:bodyPr>
           <a:lstStyle/>
@@ -6925,7 +7137,7 @@
             <a:r>
               <a:rPr sz="1400" b="1" i="0">
                 <a:solidFill>
-                  <a:srgbClr val="FFFFFF"/>
+                  <a:srgbClr val="3987E5"/>
                 </a:solidFill>
                 <a:latin typeface="Calibri"/>
               </a:rPr>
@@ -6964,7 +7176,7 @@
     <p:bg>
       <p:bgPr>
         <a:solidFill>
-          <a:srgbClr val="FCFCFB"/>
+          <a:srgbClr val="1A1A19"/>
         </a:solidFill>
         <a:effectLst/>
       </p:bgPr>
@@ -7006,7 +7218,7 @@
             <a:r>
               <a:rPr sz="2500" b="1" i="0">
                 <a:solidFill>
-                  <a:srgbClr val="0B0B0B"/>
+                  <a:srgbClr val="FFFFFF"/>
                 </a:solidFill>
                 <a:latin typeface="Calibri"/>
               </a:rPr>
@@ -7022,11 +7234,11 @@
             <a:r>
               <a:rPr sz="1300" b="0" i="0">
                 <a:solidFill>
-                  <a:srgbClr val="52514E"/>
+                  <a:srgbClr val="C3C2B7"/>
                 </a:solidFill>
                 <a:latin typeface="Calibri"/>
               </a:rPr>
-              <a:t>₹29.3M → ₹58.0M net revenue · 12.4% → 7.1% margin</a:t>
+              <a:t>₹29.3M to ₹58.0M net revenue · 12.4% to 7.1% margin</a:t>
             </a:r>
           </a:p>
         </p:txBody>
@@ -7045,9 +7257,17 @@
           <a:prstGeom prst="rect">
             <a:avLst/>
           </a:prstGeom>
-          <a:solidFill>
-            <a:srgbClr val="2A78D6"/>
-          </a:solidFill>
+          <a:gradFill rotWithShape="1">
+            <a:gsLst>
+              <a:gs pos="0">
+                <a:srgbClr val="3987E5"/>
+              </a:gs>
+              <a:gs pos="100000">
+                <a:srgbClr val="9085E9"/>
+              </a:gs>
+            </a:gsLst>
+            <a:lin scaled="0" ang="0"/>
+          </a:gradFill>
           <a:ln>
             <a:noFill/>
           </a:ln>
@@ -7129,11 +7349,11 @@
             <a:r>
               <a:rPr sz="1400" b="0" i="0">
                 <a:solidFill>
-                  <a:srgbClr val="52514E"/>
+                  <a:srgbClr val="C3C2B7"/>
                 </a:solidFill>
                 <a:latin typeface="Calibri"/>
               </a:rPr>
-              <a:t>Total contribution across the three years: ₹11.6M on ₹130.8M of net revenue — an 8.9% margin.</a:t>
+              <a:t>Total contribution across the three years: ₹11.6M on ₹130.8M of net revenue, an 8.9% margin.</a:t>
             </a:r>
           </a:p>
         </p:txBody>
@@ -7152,7 +7372,7 @@
     <p:bg>
       <p:bgPr>
         <a:solidFill>
-          <a:srgbClr val="2A78D6"/>
+          <a:srgbClr val="0D0D0D"/>
         </a:solidFill>
         <a:effectLst/>
       </p:bgPr>
@@ -7166,13 +7386,65 @@
       <p:grpSpPr/>
       <p:sp>
         <p:nvSpPr>
-          <p:cNvPr id="2" name="TextBox 1"/>
+          <p:cNvPr id="2" name="Rectangle 1"/>
+          <p:cNvSpPr/>
+          <p:nvPr/>
+        </p:nvSpPr>
+        <p:spPr>
+          <a:xfrm>
+            <a:off x="566928" y="3035808"/>
+            <a:ext cx="822960" cy="28575"/>
+          </a:xfrm>
+          <a:prstGeom prst="rect">
+            <a:avLst/>
+          </a:prstGeom>
+          <a:gradFill rotWithShape="1">
+            <a:gsLst>
+              <a:gs pos="0">
+                <a:srgbClr val="3987E5"/>
+              </a:gs>
+              <a:gs pos="100000">
+                <a:srgbClr val="9085E9"/>
+              </a:gs>
+            </a:gsLst>
+            <a:lin scaled="0" ang="0"/>
+          </a:gradFill>
+          <a:ln>
+            <a:noFill/>
+          </a:ln>
+          <a:effectLst/>
+        </p:spPr>
+        <p:style>
+          <a:lnRef idx="1">
+            <a:schemeClr val="accent1"/>
+          </a:lnRef>
+          <a:fillRef idx="3">
+            <a:schemeClr val="accent1"/>
+          </a:fillRef>
+          <a:effectRef idx="2">
+            <a:schemeClr val="accent1"/>
+          </a:effectRef>
+          <a:fontRef idx="minor">
+            <a:schemeClr val="lt1"/>
+          </a:fontRef>
+        </p:style>
+        <p:txBody>
+          <a:bodyPr rtlCol="0" anchor="ctr"/>
+          <a:lstStyle/>
+          <a:p>
+            <a:pPr algn="ctr"/>
+          </a:p>
+        </p:txBody>
+      </p:sp>
+      <p:sp>
+        <p:nvSpPr>
+          <p:cNvPr id="3" name="TextBox 2"/>
           <p:cNvSpPr txBox="1"/>
           <p:nvPr/>
         </p:nvSpPr>
         <p:spPr>
           <a:xfrm>
-            <a:off x="566928" y="2377440"/>
+            <a:off x="566928" y="2148840"/>
             <a:ext cx="11057839" cy="2194560"/>
           </a:xfrm>
           <a:prstGeom prst="rect">
@@ -7181,7 +7453,7 @@
           <a:noFill/>
         </p:spPr>
         <p:txBody>
-          <a:bodyPr wrap="square" anchor="ctr">
+          <a:bodyPr wrap="square" anchor="t">
             <a:spAutoFit/>
           </a:bodyPr>
           <a:lstStyle/>
@@ -7194,7 +7466,7 @@
             <a:r>
               <a:rPr sz="1400" b="1" i="0">
                 <a:solidFill>
-                  <a:srgbClr val="FFFFFF"/>
+                  <a:srgbClr val="3987E5"/>
                 </a:solidFill>
                 <a:latin typeface="Calibri"/>
               </a:rPr>
@@ -7233,7 +7505,7 @@
     <p:bg>
       <p:bgPr>
         <a:solidFill>
-          <a:srgbClr val="FCFCFB"/>
+          <a:srgbClr val="1A1A19"/>
         </a:solidFill>
         <a:effectLst/>
       </p:bgPr>
@@ -7275,7 +7547,7 @@
             <a:r>
               <a:rPr sz="2500" b="1" i="0">
                 <a:solidFill>
-                  <a:srgbClr val="0B0B0B"/>
+                  <a:srgbClr val="FFFFFF"/>
                 </a:solidFill>
                 <a:latin typeface="Calibri"/>
               </a:rPr>
@@ -7291,7 +7563,7 @@
             <a:r>
               <a:rPr sz="1300" b="0" i="0">
                 <a:solidFill>
-                  <a:srgbClr val="52514E"/>
+                  <a:srgbClr val="C3C2B7"/>
                 </a:solidFill>
                 <a:latin typeface="Calibri"/>
               </a:rPr>
@@ -7314,9 +7586,17 @@
           <a:prstGeom prst="rect">
             <a:avLst/>
           </a:prstGeom>
-          <a:solidFill>
-            <a:srgbClr val="2A78D6"/>
-          </a:solidFill>
+          <a:gradFill rotWithShape="1">
+            <a:gsLst>
+              <a:gs pos="0">
+                <a:srgbClr val="3987E5"/>
+              </a:gs>
+              <a:gs pos="100000">
+                <a:srgbClr val="9085E9"/>
+              </a:gs>
+            </a:gsLst>
+            <a:lin scaled="0" ang="0"/>
+          </a:gradFill>
           <a:ln>
             <a:noFill/>
           </a:ln>
@@ -7398,11 +7678,11 @@
             <a:r>
               <a:rPr sz="1400" b="0" i="0">
                 <a:solidFill>
-                  <a:srgbClr val="52514E"/>
+                  <a:srgbClr val="C3C2B7"/>
                 </a:solidFill>
                 <a:latin typeface="Calibri"/>
               </a:rPr>
-              <a:t>Average discount rose 11.0% → 14.9%; new-customer share of orders rose 38% → 50%.</a:t>
+              <a:t>Average discount rose from 11.0% to 14.9%; new customers' share of orders rose from 38% to 50%.</a:t>
             </a:r>
           </a:p>
         </p:txBody>
@@ -7421,7 +7701,7 @@
     <p:bg>
       <p:bgPr>
         <a:solidFill>
-          <a:srgbClr val="2A78D6"/>
+          <a:srgbClr val="0D0D0D"/>
         </a:solidFill>
         <a:effectLst/>
       </p:bgPr>
@@ -7435,13 +7715,65 @@
       <p:grpSpPr/>
       <p:sp>
         <p:nvSpPr>
-          <p:cNvPr id="2" name="TextBox 1"/>
+          <p:cNvPr id="2" name="Rectangle 1"/>
+          <p:cNvSpPr/>
+          <p:nvPr/>
+        </p:nvSpPr>
+        <p:spPr>
+          <a:xfrm>
+            <a:off x="566928" y="3035808"/>
+            <a:ext cx="822960" cy="28575"/>
+          </a:xfrm>
+          <a:prstGeom prst="rect">
+            <a:avLst/>
+          </a:prstGeom>
+          <a:gradFill rotWithShape="1">
+            <a:gsLst>
+              <a:gs pos="0">
+                <a:srgbClr val="3987E5"/>
+              </a:gs>
+              <a:gs pos="100000">
+                <a:srgbClr val="9085E9"/>
+              </a:gs>
+            </a:gsLst>
+            <a:lin scaled="0" ang="0"/>
+          </a:gradFill>
+          <a:ln>
+            <a:noFill/>
+          </a:ln>
+          <a:effectLst/>
+        </p:spPr>
+        <p:style>
+          <a:lnRef idx="1">
+            <a:schemeClr val="accent1"/>
+          </a:lnRef>
+          <a:fillRef idx="3">
+            <a:schemeClr val="accent1"/>
+          </a:fillRef>
+          <a:effectRef idx="2">
+            <a:schemeClr val="accent1"/>
+          </a:effectRef>
+          <a:fontRef idx="minor">
+            <a:schemeClr val="lt1"/>
+          </a:fontRef>
+        </p:style>
+        <p:txBody>
+          <a:bodyPr rtlCol="0" anchor="ctr"/>
+          <a:lstStyle/>
+          <a:p>
+            <a:pPr algn="ctr"/>
+          </a:p>
+        </p:txBody>
+      </p:sp>
+      <p:sp>
+        <p:nvSpPr>
+          <p:cNvPr id="3" name="TextBox 2"/>
           <p:cNvSpPr txBox="1"/>
           <p:nvPr/>
         </p:nvSpPr>
         <p:spPr>
           <a:xfrm>
-            <a:off x="566928" y="2377440"/>
+            <a:off x="566928" y="2148840"/>
             <a:ext cx="11057839" cy="2194560"/>
           </a:xfrm>
           <a:prstGeom prst="rect">
@@ -7450,7 +7782,7 @@
           <a:noFill/>
         </p:spPr>
         <p:txBody>
-          <a:bodyPr wrap="square" anchor="ctr">
+          <a:bodyPr wrap="square" anchor="t">
             <a:spAutoFit/>
           </a:bodyPr>
           <a:lstStyle/>
@@ -7463,7 +7795,7 @@
             <a:r>
               <a:rPr sz="1400" b="1" i="0">
                 <a:solidFill>
-                  <a:srgbClr val="FFFFFF"/>
+                  <a:srgbClr val="3987E5"/>
                 </a:solidFill>
                 <a:latin typeface="Calibri"/>
               </a:rPr>
@@ -7502,7 +7834,7 @@
     <p:bg>
       <p:bgPr>
         <a:solidFill>
-          <a:srgbClr val="FCFCFB"/>
+          <a:srgbClr val="1A1A19"/>
         </a:solidFill>
         <a:effectLst/>
       </p:bgPr>
@@ -7544,11 +7876,11 @@
             <a:r>
               <a:rPr sz="2500" b="1" i="0">
                 <a:solidFill>
-                  <a:srgbClr val="0B0B0B"/>
+                  <a:srgbClr val="FFFFFF"/>
                 </a:solidFill>
                 <a:latin typeface="Calibri"/>
               </a:rPr>
-              <a:t>It is not what we sell that changed — it is what we earn on it</a:t>
+              <a:t>What we sell has not changed much. What we earn on it has.</a:t>
             </a:r>
           </a:p>
           <a:p>
@@ -7560,7 +7892,7 @@
             <a:r>
               <a:rPr sz="1300" b="0" i="0">
                 <a:solidFill>
-                  <a:srgbClr val="52514E"/>
+                  <a:srgbClr val="C3C2B7"/>
                 </a:solidFill>
                 <a:latin typeface="Calibri"/>
               </a:rPr>
@@ -7583,9 +7915,17 @@
           <a:prstGeom prst="rect">
             <a:avLst/>
           </a:prstGeom>
-          <a:solidFill>
-            <a:srgbClr val="2A78D6"/>
-          </a:solidFill>
+          <a:gradFill rotWithShape="1">
+            <a:gsLst>
+              <a:gs pos="0">
+                <a:srgbClr val="3987E5"/>
+              </a:gs>
+              <a:gs pos="100000">
+                <a:srgbClr val="9085E9"/>
+              </a:gs>
+            </a:gsLst>
+            <a:lin scaled="0" ang="0"/>
+          </a:gradFill>
           <a:ln>
             <a:noFill/>
           </a:ln>
@@ -7667,11 +8007,11 @@
             <a:r>
               <a:rPr sz="1400" b="0" i="0">
                 <a:solidFill>
-                  <a:srgbClr val="52514E"/>
+                  <a:srgbClr val="C3C2B7"/>
                 </a:solidFill>
                 <a:latin typeface="Calibri"/>
               </a:rPr>
-              <a:t>This matters because the two explanations imply opposite actions: a mix problem is fixed by selling something else, an erosion problem by changing the terms we sell on.</a:t>
+              <a:t>The distinction matters because the two explanations call for opposite actions: a mix problem is fixed by selling something else, an erosion problem by changing the terms we sell on.</a:t>
             </a:r>
           </a:p>
         </p:txBody>
@@ -7690,7 +8030,7 @@
     <p:bg>
       <p:bgPr>
         <a:solidFill>
-          <a:srgbClr val="FCFCFB"/>
+          <a:srgbClr val="1A1A19"/>
         </a:solidFill>
         <a:effectLst/>
       </p:bgPr>
@@ -7732,7 +8072,7 @@
             <a:r>
               <a:rPr sz="2500" b="1" i="0">
                 <a:solidFill>
-                  <a:srgbClr val="0B0B0B"/>
+                  <a:srgbClr val="FFFFFF"/>
                 </a:solidFill>
                 <a:latin typeface="Calibri"/>
               </a:rPr>
@@ -7748,11 +8088,11 @@
             <a:r>
               <a:rPr sz="1300" b="0" i="0">
                 <a:solidFill>
-                  <a:srgbClr val="52514E"/>
+                  <a:srgbClr val="C3C2B7"/>
                 </a:solidFill>
                 <a:latin typeface="Calibri"/>
               </a:rPr>
-              <a:t>Electronics is 51% of net revenue at -4.9% margin — Smartphones alone are 31% of revenue at -9.1%</a:t>
+              <a:t>Electronics is 51% of net revenue at -4.9% margin. Smartphones alone are 31% of revenue at -9.1%.</a:t>
             </a:r>
           </a:p>
         </p:txBody>
@@ -7771,9 +8111,17 @@
           <a:prstGeom prst="rect">
             <a:avLst/>
           </a:prstGeom>
-          <a:solidFill>
-            <a:srgbClr val="2A78D6"/>
-          </a:solidFill>
+          <a:gradFill rotWithShape="1">
+            <a:gsLst>
+              <a:gs pos="0">
+                <a:srgbClr val="3987E5"/>
+              </a:gs>
+              <a:gs pos="100000">
+                <a:srgbClr val="9085E9"/>
+              </a:gs>
+            </a:gsLst>
+            <a:lin scaled="0" ang="0"/>
+          </a:gradFill>
           <a:ln>
             <a:noFill/>
           </a:ln>
@@ -7855,7 +8203,7 @@
             <a:r>
               <a:rPr sz="1400" b="0" i="0">
                 <a:solidFill>
-                  <a:srgbClr val="52514E"/>
+                  <a:srgbClr val="C3C2B7"/>
                 </a:solidFill>
                 <a:latin typeface="Calibri"/>
               </a:rPr>
@@ -7878,7 +8226,7 @@
     <p:bg>
       <p:bgPr>
         <a:solidFill>
-          <a:srgbClr val="FCFCFB"/>
+          <a:srgbClr val="1A1A19"/>
         </a:solidFill>
         <a:effectLst/>
       </p:bgPr>
@@ -7920,7 +8268,7 @@
             <a:r>
               <a:rPr sz="2500" b="1" i="0">
                 <a:solidFill>
-                  <a:srgbClr val="0B0B0B"/>
+                  <a:srgbClr val="FFFFFF"/>
                 </a:solidFill>
                 <a:latin typeface="Calibri"/>
               </a:rPr>
@@ -7936,7 +8284,7 @@
             <a:r>
               <a:rPr sz="1300" b="0" i="0">
                 <a:solidFill>
-                  <a:srgbClr val="52514E"/>
+                  <a:srgbClr val="C3C2B7"/>
                 </a:solidFill>
                 <a:latin typeface="Calibri"/>
               </a:rPr>
@@ -7959,9 +8307,17 @@
           <a:prstGeom prst="rect">
             <a:avLst/>
           </a:prstGeom>
-          <a:solidFill>
-            <a:srgbClr val="2A78D6"/>
-          </a:solidFill>
+          <a:gradFill rotWithShape="1">
+            <a:gsLst>
+              <a:gs pos="0">
+                <a:srgbClr val="3987E5"/>
+              </a:gs>
+              <a:gs pos="100000">
+                <a:srgbClr val="9085E9"/>
+              </a:gs>
+            </a:gsLst>
+            <a:lin scaled="0" ang="0"/>
+          </a:gradFill>
           <a:ln>
             <a:noFill/>
           </a:ln>
@@ -8043,11 +8399,11 @@
             <a:r>
               <a:rPr sz="1400" b="0" i="0">
                 <a:solidFill>
-                  <a:srgbClr val="52514E"/>
+                  <a:srgbClr val="C3C2B7"/>
                 </a:solidFill>
                 <a:latin typeface="Calibri"/>
               </a:rPr>
-              <a:t>Delivery, marketing and operating costs are near-identical across all five categories. The gap is entirely in what the goods cost us relative to what we charge for them.</a:t>
+              <a:t>Delivery, marketing and operating costs are near-identical across all five categories. The gap sits entirely in what the goods cost us relative to what we charge for them.</a:t>
             </a:r>
           </a:p>
         </p:txBody>
